--- a/media/resources/files/4-Amal-BingoOyunu.pptx
+++ b/media/resources/files/4-Amal-BingoOyunu.pptx
@@ -14269,7 +14269,7 @@
             </a:pPr>
             <a:r>
               <a:rPr lang="ru-RU" dirty="0"/>
-              <a:t>Турдуу пикирлер учун ыраазычылык билдиребиз.</a:t>
+              <a:t>Түрдүү пикирлер үчүн ыраазычылык билдиребиз.</a:t>
             </a:r>
           </a:p>
           <a:p>

--- a/media/resources/files/4-Amal-BingoOyunu.pptx
+++ b/media/resources/files/4-Amal-BingoOyunu.pptx
@@ -7147,7 +7147,108 @@
           <a:p>
             <a:r>
               <a:rPr lang="en-US" dirty="0" err="1"/>
-              <a:t>Студенттер</a:t>
+              <a:t>Окуучулар тордон тогуз жоопту тандап, китептеги 3х3 чакмакка каалагандай коюшат.</a:t>
+            </a:r>
+            <a:r>
+              <a:rPr lang="en-US" dirty="0"/>
+              <a:t/>
+            </a:r>
+            <a:r>
+              <a:rPr lang="en-US" dirty="0" err="1"/>
+              <a:t/>
+            </a:r>
+            <a:r>
+              <a:rPr lang="en-US" dirty="0"/>
+              <a:t/>
+            </a:r>
+            <a:r>
+              <a:rPr lang="en-US" dirty="0" err="1"/>
+              <a:t/>
+            </a:r>
+            <a:r>
+              <a:rPr lang="en-US" dirty="0"/>
+              <a:t/>
+            </a:r>
+            <a:r>
+              <a:rPr lang="en-US" dirty="0" err="1"/>
+              <a:t/>
+            </a:r>
+            <a:r>
+              <a:rPr lang="en-US" dirty="0"/>
+              <a:t/>
+            </a:r>
+            <a:r>
+              <a:rPr lang="en-US" dirty="0" err="1"/>
+              <a:t/>
+            </a:r>
+            <a:r>
+              <a:rPr lang="en-US" dirty="0"/>
+              <a:t/>
+            </a:r>
+            <a:r>
+              <a:rPr lang="en-US" dirty="0" err="1"/>
+              <a:t/>
+            </a:r>
+            <a:r>
+              <a:rPr lang="en-US" dirty="0"/>
+              <a:t/>
+            </a:r>
+            <a:r>
+              <a:rPr lang="en-US" dirty="0" err="1"/>
+              <a:t/>
+            </a:r>
+            <a:r>
+              <a:rPr lang="en-US" dirty="0"/>
+              <a:t/>
+            </a:r>
+            <a:r>
+              <a:rPr lang="en-US" dirty="0" err="1"/>
+              <a:t/>
+            </a:r>
+            <a:r>
+              <a:rPr lang="en-US" dirty="0"/>
+              <a:t/>
+            </a:r>
+            <a:r>
+              <a:rPr lang="en-US" dirty="0" err="1"/>
+              <a:t/>
+            </a:r>
+            <a:r>
+              <a:rPr lang="en-US" dirty="0"/>
+              <a:t/>
+            </a:r>
+            <a:r>
+              <a:rPr lang="en-US" dirty="0" err="1"/>
+              <a:t/>
+            </a:r>
+            <a:r>
+              <a:rPr lang="en-US" dirty="0"/>
+              <a:t/>
+            </a:r>
+            <a:r>
+              <a:rPr lang="en-US" dirty="0" err="1"/>
+              <a:t/>
+            </a:r>
+            <a:r>
+              <a:rPr lang="en-US" dirty="0"/>
+              <a:t/>
+            </a:r>
+            <a:r>
+              <a:rPr lang="en-US" dirty="0" err="1"/>
+              <a:t/>
+            </a:r>
+            <a:r>
+              <a:rPr lang="en-US" dirty="0"/>
+              <a:t/>
+            </a:r>
+          </a:p>
+          <a:p>
+            <a:endParaRPr lang="en-US" dirty="0"/>
+          </a:p>
+          <a:p>
+            <a:r>
+              <a:rPr lang="en-US" dirty="0" err="1"/>
+              <a:t>Сиз</a:t>
             </a:r>
             <a:r>
               <a:rPr lang="en-US" dirty="0"/>
@@ -7155,7 +7256,7 @@
             </a:r>
             <a:r>
               <a:rPr lang="en-US" dirty="0" err="1"/>
-              <a:t>тордон</a:t>
+              <a:t>дисплейиңизди</a:t>
             </a:r>
             <a:r>
               <a:rPr lang="en-US" dirty="0"/>
@@ -7163,7 +7264,15 @@
             </a:r>
             <a:r>
               <a:rPr lang="en-US" dirty="0" err="1"/>
-              <a:t>тогуз</a:t>
+              <a:t>тындырып</a:t>
+            </a:r>
+            <a:r>
+              <a:rPr lang="en-US" dirty="0"/>
+              <a:t>, </a:t>
+            </a:r>
+            <a:r>
+              <a:rPr lang="en-US" dirty="0" err="1"/>
+              <a:t>оюн</a:t>
             </a:r>
             <a:r>
               <a:rPr lang="en-US" dirty="0"/>
@@ -7171,7 +7280,7 @@
             </a:r>
             <a:r>
               <a:rPr lang="en-US" dirty="0" err="1"/>
-              <a:t>жоопту</a:t>
+              <a:t>учурундагы</a:t>
             </a:r>
             <a:r>
               <a:rPr lang="en-US" dirty="0"/>
@@ -7179,15 +7288,7 @@
             </a:r>
             <a:r>
               <a:rPr lang="en-US" dirty="0" err="1"/>
-              <a:t>тандап</a:t>
-            </a:r>
-            <a:r>
-              <a:rPr lang="en-US" dirty="0"/>
-              <a:t>, </a:t>
-            </a:r>
-            <a:r>
-              <a:rPr lang="en-US" dirty="0" err="1"/>
-              <a:t>аларды</a:t>
+              <a:t>кыйынчылыкка</a:t>
             </a:r>
             <a:r>
               <a:rPr lang="en-US" dirty="0"/>
@@ -7195,15 +7296,7 @@
             </a:r>
             <a:r>
               <a:rPr lang="en-US" dirty="0" err="1"/>
-              <a:t>китебиндеги</a:t>
-            </a:r>
-            <a:r>
-              <a:rPr lang="en-US" dirty="0"/>
-              <a:t> 3х3 </a:t>
-            </a:r>
-            <a:r>
-              <a:rPr lang="en-US" dirty="0" err="1"/>
-              <a:t>квадратка</a:t>
+              <a:t>жараша</a:t>
             </a:r>
             <a:r>
               <a:rPr lang="en-US" dirty="0"/>
@@ -7211,7 +7304,7 @@
             </a:r>
             <a:r>
               <a:rPr lang="en-US" dirty="0" err="1"/>
-              <a:t>туш</a:t>
+              <a:t>суроолорду</a:t>
             </a:r>
             <a:r>
               <a:rPr lang="en-US" dirty="0"/>
@@ -7219,7 +7312,7 @@
             </a:r>
             <a:r>
               <a:rPr lang="en-US" dirty="0" err="1"/>
-              <a:t>келди</a:t>
+              <a:t>тандасаңыз</a:t>
             </a:r>
             <a:r>
               <a:rPr lang="en-US" dirty="0"/>
@@ -7227,15 +7320,7 @@
             </a:r>
             <a:r>
               <a:rPr lang="en-US" dirty="0" err="1"/>
-              <a:t>жайгаштырышы</a:t>
-            </a:r>
-            <a:r>
-              <a:rPr lang="en-US" dirty="0"/>
-              <a:t> </a:t>
-            </a:r>
-            <a:r>
-              <a:rPr lang="en-US" dirty="0" err="1"/>
-              <a:t>керек</a:t>
+              <a:t>болот</a:t>
             </a:r>
             <a:r>
               <a:rPr lang="en-US" dirty="0"/>
@@ -7248,184 +7333,99 @@
           <a:p>
             <a:r>
               <a:rPr lang="en-US" dirty="0" err="1"/>
-              <a:t>Сиз</a:t>
+              <a:t>Убакытка жараша окуучулар сызык, X же бүт тор («бардыгы») менен жеңе алат.</a:t>
             </a:r>
             <a:r>
               <a:rPr lang="en-US" dirty="0"/>
-              <a:t> </a:t>
+              <a:t/>
             </a:r>
             <a:r>
               <a:rPr lang="en-US" dirty="0" err="1"/>
-              <a:t>дисплейиңизди</a:t>
+              <a:t/>
             </a:r>
             <a:r>
               <a:rPr lang="en-US" dirty="0"/>
-              <a:t> </a:t>
+              <a:t/>
             </a:r>
             <a:r>
               <a:rPr lang="en-US" dirty="0" err="1"/>
-              <a:t>тындырып</a:t>
+              <a:t/>
             </a:r>
             <a:r>
               <a:rPr lang="en-US" dirty="0"/>
-              <a:t>, </a:t>
+              <a:t/>
             </a:r>
             <a:r>
               <a:rPr lang="en-US" dirty="0" err="1"/>
-              <a:t>оюн</a:t>
+              <a:t/>
             </a:r>
             <a:r>
               <a:rPr lang="en-US" dirty="0"/>
-              <a:t> </a:t>
+              <a:t/>
             </a:r>
             <a:r>
               <a:rPr lang="en-US" dirty="0" err="1"/>
-              <a:t>учурундагы</a:t>
+              <a:t/>
             </a:r>
             <a:r>
               <a:rPr lang="en-US" dirty="0"/>
-              <a:t> </a:t>
+              <a:t/>
             </a:r>
             <a:r>
               <a:rPr lang="en-US" dirty="0" err="1"/>
-              <a:t>кыйынчылыкка</a:t>
+              <a:t/>
             </a:r>
             <a:r>
               <a:rPr lang="en-US" dirty="0"/>
-              <a:t> </a:t>
+              <a:t/>
             </a:r>
             <a:r>
               <a:rPr lang="en-US" dirty="0" err="1"/>
-              <a:t>жараша</a:t>
+              <a:t/>
             </a:r>
             <a:r>
               <a:rPr lang="en-US" dirty="0"/>
-              <a:t> </a:t>
+              <a:t/>
             </a:r>
             <a:r>
               <a:rPr lang="en-US" dirty="0" err="1"/>
-              <a:t>суроолорду</a:t>
+              <a:t/>
             </a:r>
             <a:r>
               <a:rPr lang="en-US" dirty="0"/>
-              <a:t> </a:t>
+              <a:t/>
             </a:r>
             <a:r>
               <a:rPr lang="en-US" dirty="0" err="1"/>
-              <a:t>тандасаңыз</a:t>
+              <a:t/>
             </a:r>
             <a:r>
               <a:rPr lang="en-US" dirty="0"/>
-              <a:t> </a:t>
+              <a:t/>
             </a:r>
             <a:r>
               <a:rPr lang="en-US" dirty="0" err="1"/>
-              <a:t>болот</a:t>
+              <a:t/>
             </a:r>
             <a:r>
               <a:rPr lang="en-US" dirty="0"/>
-              <a:t>.</a:t>
-            </a:r>
-          </a:p>
-          <a:p>
-            <a:endParaRPr lang="en-US" dirty="0"/>
-          </a:p>
-          <a:p>
+              <a:t/>
+            </a:r>
             <a:r>
               <a:rPr lang="en-US" dirty="0" err="1"/>
-              <a:t>Убакыттын</a:t>
+              <a:t/>
             </a:r>
             <a:r>
               <a:rPr lang="en-US" dirty="0"/>
-              <a:t> </a:t>
+              <a:t/>
             </a:r>
             <a:r>
               <a:rPr lang="en-US" dirty="0" err="1"/>
-              <a:t>өтүшүнө</a:t>
+              <a:t/>
             </a:r>
             <a:r>
               <a:rPr lang="en-US" dirty="0"/>
-              <a:t> </a:t>
-            </a:r>
-            <a:r>
-              <a:rPr lang="en-US" dirty="0" err="1"/>
-              <a:t>жараша</a:t>
-            </a:r>
-            <a:r>
-              <a:rPr lang="en-US" dirty="0"/>
-              <a:t>, </a:t>
-            </a:r>
-            <a:r>
-              <a:rPr lang="en-US" dirty="0" err="1"/>
-              <a:t>студенттер</a:t>
-            </a:r>
-            <a:r>
-              <a:rPr lang="en-US" dirty="0"/>
-              <a:t> </a:t>
-            </a:r>
-            <a:r>
-              <a:rPr lang="en-US" dirty="0" err="1"/>
-              <a:t>сызык</a:t>
-            </a:r>
-            <a:r>
-              <a:rPr lang="en-US" dirty="0"/>
-              <a:t>, X </a:t>
-            </a:r>
-            <a:r>
-              <a:rPr lang="en-US" dirty="0" err="1"/>
-              <a:t>же</a:t>
-            </a:r>
-            <a:r>
-              <a:rPr lang="en-US" dirty="0"/>
-              <a:t> "</a:t>
-            </a:r>
-            <a:r>
-              <a:rPr lang="en-US" dirty="0" err="1"/>
-              <a:t>толук</a:t>
-            </a:r>
-            <a:r>
-              <a:rPr lang="en-US" dirty="0"/>
-              <a:t> </a:t>
-            </a:r>
-            <a:r>
-              <a:rPr lang="en-US" dirty="0" err="1"/>
-              <a:t>үй</a:t>
-            </a:r>
-            <a:r>
-              <a:rPr lang="en-US" dirty="0"/>
-              <a:t>" (</a:t>
-            </a:r>
-            <a:r>
-              <a:rPr lang="en-US" dirty="0" err="1"/>
-              <a:t>бардыгы</a:t>
-            </a:r>
-            <a:r>
-              <a:rPr lang="en-US" dirty="0"/>
-              <a:t>) </a:t>
-            </a:r>
-            <a:r>
-              <a:rPr lang="en-US" dirty="0" err="1"/>
-              <a:t>менен</a:t>
-            </a:r>
-            <a:r>
-              <a:rPr lang="en-US" dirty="0"/>
-              <a:t> </a:t>
-            </a:r>
-            <a:r>
-              <a:rPr lang="en-US" dirty="0" err="1"/>
-              <a:t>жеңе</a:t>
-            </a:r>
-            <a:r>
-              <a:rPr lang="en-US" dirty="0"/>
-              <a:t> </a:t>
-            </a:r>
-            <a:r>
-              <a:rPr lang="en-US" dirty="0" err="1"/>
-              <a:t>алышат</a:t>
-            </a:r>
-            <a:r>
-              <a:rPr lang="en-US" dirty="0"/>
-              <a:t>.</a:t>
+              <a:t/>
             </a:r>
           </a:p>
         </p:txBody>
